--- a/make_presentation/templates/templates/creative/_6.pptx
+++ b/make_presentation/templates/templates/creative/_6.pptx
@@ -72,13 +72,7 @@
               <a:rPr b="0" lang="en-US" sz="4400" spc="-1" strike="noStrike">
                 <a:latin typeface="Arial"/>
               </a:rPr>
-              <a:t>Click to move </a:t>
-            </a:r>
-            <a:r>
-              <a:rPr b="0" lang="en-US" sz="4400" spc="-1" strike="noStrike">
-                <a:latin typeface="Arial"/>
-              </a:rPr>
-              <a:t>the slide</a:t>
+              <a:t>Click to move the slide</a:t>
             </a:r>
             <a:endParaRPr b="0" lang="en-US" sz="4400" spc="-1" strike="noStrike">
               <a:latin typeface="Arial"/>
@@ -303,7 +297,7 @@
             <a:pPr algn="r">
               <a:buNone/>
             </a:pPr>
-            <a:fld id="{6BF63039-B886-48A3-94CC-E346A9D7F192}" type="slidenum">
+            <a:fld id="{DFB4DFBF-EEFE-477E-A5DD-FD849F1FE9DC}" type="slidenum">
               <a:rPr b="0" lang="en-US" sz="1400" spc="-1" strike="noStrike">
                 <a:latin typeface="Times New Roman"/>
               </a:rPr>
@@ -351,7 +345,7 @@
         <p:spPr>
           <a:xfrm>
             <a:off x="685800" y="1143000"/>
-            <a:ext cx="5485680" cy="3085560"/>
+            <a:ext cx="5485320" cy="3085200"/>
           </a:xfrm>
           <a:prstGeom prst="rect">
             <a:avLst/>
@@ -374,7 +368,7 @@
         <p:spPr>
           <a:xfrm>
             <a:off x="685800" y="4400640"/>
-            <a:ext cx="5485680" cy="3599640"/>
+            <a:ext cx="5485320" cy="3599280"/>
           </a:xfrm>
           <a:prstGeom prst="rect">
             <a:avLst/>
@@ -408,7 +402,7 @@
         <p:spPr>
           <a:xfrm>
             <a:off x="3884760" y="8685360"/>
-            <a:ext cx="2971080" cy="457920"/>
+            <a:ext cx="2970720" cy="457560"/>
           </a:xfrm>
           <a:prstGeom prst="rect">
             <a:avLst/>
@@ -440,7 +434,7 @@
               </a:lnSpc>
               <a:buNone/>
             </a:pPr>
-            <a:fld id="{7D16DBC5-3D9D-4059-B3F4-9372D8CF9F95}" type="slidenum">
+            <a:fld id="{0F6D72F7-A598-4A25-85D0-2830AB1A05B1}" type="slidenum">
               <a:rPr b="0" lang="ru-RU" sz="1200" spc="-1" strike="noStrike">
                 <a:latin typeface="Times New Roman"/>
               </a:rPr>
@@ -487,7 +481,7 @@
         <p:spPr>
           <a:xfrm>
             <a:off x="685800" y="1143000"/>
-            <a:ext cx="5485680" cy="3085560"/>
+            <a:ext cx="5485320" cy="3085200"/>
           </a:xfrm>
           <a:prstGeom prst="rect">
             <a:avLst/>
@@ -510,7 +504,7 @@
         <p:spPr>
           <a:xfrm>
             <a:off x="685800" y="4400640"/>
-            <a:ext cx="5485680" cy="3599640"/>
+            <a:ext cx="5485320" cy="3599280"/>
           </a:xfrm>
           <a:prstGeom prst="rect">
             <a:avLst/>
@@ -544,7 +538,7 @@
         <p:spPr>
           <a:xfrm>
             <a:off x="3884760" y="8685360"/>
-            <a:ext cx="2971080" cy="457920"/>
+            <a:ext cx="2970720" cy="457560"/>
           </a:xfrm>
           <a:prstGeom prst="rect">
             <a:avLst/>
@@ -576,7 +570,7 @@
               </a:lnSpc>
               <a:buNone/>
             </a:pPr>
-            <a:fld id="{0F7D62D6-587E-4793-BEF6-3E9B5B3A7A72}" type="slidenum">
+            <a:fld id="{0AB4DC05-C6E1-4E1D-A126-30954BAD5CAC}" type="slidenum">
               <a:rPr b="0" lang="ru-RU" sz="1200" spc="-1" strike="noStrike">
                 <a:latin typeface="Times New Roman"/>
               </a:rPr>
@@ -644,7 +638,7 @@
         <p:txBody>
           <a:bodyPr/>
           <a:p>
-            <a:fld id="{9DF92131-B9D4-493A-8F67-778610D968BE}" type="slidenum">
+            <a:fld id="{9B06572F-3158-4F39-9CE5-6A3FA1000FE3}" type="slidenum">
               <a:t>&lt;#&gt;</a:t>
             </a:fld>
           </a:p>
@@ -706,7 +700,7 @@
         <p:spPr>
           <a:xfrm>
             <a:off x="1143000" y="841680"/>
-            <a:ext cx="6857280" cy="1789920"/>
+            <a:ext cx="6856920" cy="1789560"/>
           </a:xfrm>
           <a:prstGeom prst="rect">
             <a:avLst/>
@@ -743,7 +737,7 @@
         <p:spPr>
           <a:xfrm>
             <a:off x="457200" y="1203480"/>
-            <a:ext cx="8229240" cy="1422720"/>
+            <a:ext cx="8228880" cy="1422360"/>
           </a:xfrm>
           <a:prstGeom prst="rect">
             <a:avLst/>
@@ -776,8 +770,8 @@
         </p:nvSpPr>
         <p:spPr>
           <a:xfrm>
-            <a:off x="457200" y="2761920"/>
-            <a:ext cx="8229240" cy="1422720"/>
+            <a:off x="457200" y="2761200"/>
+            <a:ext cx="8228880" cy="1422360"/>
           </a:xfrm>
           <a:prstGeom prst="rect">
             <a:avLst/>
@@ -832,7 +826,7 @@
         <p:txBody>
           <a:bodyPr/>
           <a:p>
-            <a:fld id="{6661D29E-4F91-4259-994A-1706900B3237}" type="slidenum">
+            <a:fld id="{BBD0A3E8-1C52-4029-9004-D702E52650AB}" type="slidenum">
               <a:t>&lt;#&gt;</a:t>
             </a:fld>
           </a:p>
@@ -894,7 +888,7 @@
         <p:spPr>
           <a:xfrm>
             <a:off x="1143000" y="841680"/>
-            <a:ext cx="6857280" cy="1789920"/>
+            <a:ext cx="6856920" cy="1789560"/>
           </a:xfrm>
           <a:prstGeom prst="rect">
             <a:avLst/>
@@ -931,7 +925,7 @@
         <p:spPr>
           <a:xfrm>
             <a:off x="457200" y="1203480"/>
-            <a:ext cx="4015800" cy="1422720"/>
+            <a:ext cx="4015440" cy="1422360"/>
           </a:xfrm>
           <a:prstGeom prst="rect">
             <a:avLst/>
@@ -964,8 +958,8 @@
         </p:nvSpPr>
         <p:spPr>
           <a:xfrm>
-            <a:off x="4674240" y="1203480"/>
-            <a:ext cx="4015800" cy="1422720"/>
+            <a:off x="4673880" y="1203480"/>
+            <a:ext cx="4015440" cy="1422360"/>
           </a:xfrm>
           <a:prstGeom prst="rect">
             <a:avLst/>
@@ -998,8 +992,8 @@
         </p:nvSpPr>
         <p:spPr>
           <a:xfrm>
-            <a:off x="457200" y="2761920"/>
-            <a:ext cx="4015800" cy="1422720"/>
+            <a:off x="457200" y="2761200"/>
+            <a:ext cx="4015440" cy="1422360"/>
           </a:xfrm>
           <a:prstGeom prst="rect">
             <a:avLst/>
@@ -1032,8 +1026,8 @@
         </p:nvSpPr>
         <p:spPr>
           <a:xfrm>
-            <a:off x="4674240" y="2761920"/>
-            <a:ext cx="4015800" cy="1422720"/>
+            <a:off x="4673880" y="2761200"/>
+            <a:ext cx="4015440" cy="1422360"/>
           </a:xfrm>
           <a:prstGeom prst="rect">
             <a:avLst/>
@@ -1088,7 +1082,7 @@
         <p:txBody>
           <a:bodyPr/>
           <a:p>
-            <a:fld id="{9FB649FC-ED75-4B51-BF48-BA1FA7C4EF3A}" type="slidenum">
+            <a:fld id="{4BE0A8A1-4842-44C0-A1FF-F44FC4504AAA}" type="slidenum">
               <a:t>&lt;#&gt;</a:t>
             </a:fld>
           </a:p>
@@ -1150,7 +1144,7 @@
         <p:spPr>
           <a:xfrm>
             <a:off x="1143000" y="841680"/>
-            <a:ext cx="6857280" cy="1789920"/>
+            <a:ext cx="6856920" cy="1789560"/>
           </a:xfrm>
           <a:prstGeom prst="rect">
             <a:avLst/>
@@ -1187,7 +1181,7 @@
         <p:spPr>
           <a:xfrm>
             <a:off x="457200" y="1203480"/>
-            <a:ext cx="2649600" cy="1422720"/>
+            <a:ext cx="2649600" cy="1422360"/>
           </a:xfrm>
           <a:prstGeom prst="rect">
             <a:avLst/>
@@ -1221,7 +1215,7 @@
         <p:spPr>
           <a:xfrm>
             <a:off x="3239640" y="1203480"/>
-            <a:ext cx="2649600" cy="1422720"/>
+            <a:ext cx="2649600" cy="1422360"/>
           </a:xfrm>
           <a:prstGeom prst="rect">
             <a:avLst/>
@@ -1255,7 +1249,7 @@
         <p:spPr>
           <a:xfrm>
             <a:off x="6022080" y="1203480"/>
-            <a:ext cx="2649600" cy="1422720"/>
+            <a:ext cx="2649600" cy="1422360"/>
           </a:xfrm>
           <a:prstGeom prst="rect">
             <a:avLst/>
@@ -1288,8 +1282,8 @@
         </p:nvSpPr>
         <p:spPr>
           <a:xfrm>
-            <a:off x="457200" y="2761920"/>
-            <a:ext cx="2649600" cy="1422720"/>
+            <a:off x="457200" y="2761200"/>
+            <a:ext cx="2649600" cy="1422360"/>
           </a:xfrm>
           <a:prstGeom prst="rect">
             <a:avLst/>
@@ -1322,8 +1316,8 @@
         </p:nvSpPr>
         <p:spPr>
           <a:xfrm>
-            <a:off x="3239640" y="2761920"/>
-            <a:ext cx="2649600" cy="1422720"/>
+            <a:off x="3239640" y="2761200"/>
+            <a:ext cx="2649600" cy="1422360"/>
           </a:xfrm>
           <a:prstGeom prst="rect">
             <a:avLst/>
@@ -1356,8 +1350,8 @@
         </p:nvSpPr>
         <p:spPr>
           <a:xfrm>
-            <a:off x="6022080" y="2761920"/>
-            <a:ext cx="2649600" cy="1422720"/>
+            <a:off x="6022080" y="2761200"/>
+            <a:ext cx="2649600" cy="1422360"/>
           </a:xfrm>
           <a:prstGeom prst="rect">
             <a:avLst/>
@@ -1412,7 +1406,7 @@
         <p:txBody>
           <a:bodyPr/>
           <a:p>
-            <a:fld id="{59EA1546-AA97-4D3A-AF82-D0912A9A0B04}" type="slidenum">
+            <a:fld id="{465CE54D-AE20-47CA-BB8E-E0240C6B0251}" type="slidenum">
               <a:t>&lt;#&gt;</a:t>
             </a:fld>
           </a:p>
@@ -1474,7 +1468,7 @@
         <p:spPr>
           <a:xfrm>
             <a:off x="1143000" y="841680"/>
-            <a:ext cx="6857280" cy="1789920"/>
+            <a:ext cx="6856920" cy="1789560"/>
           </a:xfrm>
           <a:prstGeom prst="rect">
             <a:avLst/>
@@ -1511,7 +1505,7 @@
         <p:spPr>
           <a:xfrm>
             <a:off x="457200" y="1203480"/>
-            <a:ext cx="8229240" cy="2982960"/>
+            <a:ext cx="8228880" cy="2982600"/>
           </a:xfrm>
           <a:prstGeom prst="rect">
             <a:avLst/>
@@ -1569,7 +1563,7 @@
         <p:txBody>
           <a:bodyPr/>
           <a:p>
-            <a:fld id="{052C7D99-1830-496B-BAD2-BF5434B36574}" type="slidenum">
+            <a:fld id="{D281E6FD-C098-493D-AD07-DBDF7E4750AF}" type="slidenum">
               <a:t>&lt;#&gt;</a:t>
             </a:fld>
           </a:p>
@@ -1631,7 +1625,7 @@
         <p:spPr>
           <a:xfrm>
             <a:off x="1143000" y="841680"/>
-            <a:ext cx="6857280" cy="1789920"/>
+            <a:ext cx="6856920" cy="1789560"/>
           </a:xfrm>
           <a:prstGeom prst="rect">
             <a:avLst/>
@@ -1668,7 +1662,7 @@
         <p:spPr>
           <a:xfrm>
             <a:off x="457200" y="1203480"/>
-            <a:ext cx="8229240" cy="2982960"/>
+            <a:ext cx="8228880" cy="2982600"/>
           </a:xfrm>
           <a:prstGeom prst="rect">
             <a:avLst/>
@@ -1723,7 +1717,7 @@
         <p:txBody>
           <a:bodyPr/>
           <a:p>
-            <a:fld id="{023088E1-A3EB-4B8F-8D99-D0D66B93FD91}" type="slidenum">
+            <a:fld id="{00986AD9-0764-412E-ACC7-DA44A0EEC039}" type="slidenum">
               <a:t>&lt;#&gt;</a:t>
             </a:fld>
           </a:p>
@@ -1785,7 +1779,7 @@
         <p:spPr>
           <a:xfrm>
             <a:off x="1143000" y="841680"/>
-            <a:ext cx="6857280" cy="1789920"/>
+            <a:ext cx="6856920" cy="1789560"/>
           </a:xfrm>
           <a:prstGeom prst="rect">
             <a:avLst/>
@@ -1822,7 +1816,7 @@
         <p:spPr>
           <a:xfrm>
             <a:off x="457200" y="1203480"/>
-            <a:ext cx="4015800" cy="2982960"/>
+            <a:ext cx="4015440" cy="2982600"/>
           </a:xfrm>
           <a:prstGeom prst="rect">
             <a:avLst/>
@@ -1855,8 +1849,8 @@
         </p:nvSpPr>
         <p:spPr>
           <a:xfrm>
-            <a:off x="4674240" y="1203480"/>
-            <a:ext cx="4015800" cy="2982960"/>
+            <a:off x="4673880" y="1203480"/>
+            <a:ext cx="4015440" cy="2982600"/>
           </a:xfrm>
           <a:prstGeom prst="rect">
             <a:avLst/>
@@ -1911,7 +1905,7 @@
         <p:txBody>
           <a:bodyPr/>
           <a:p>
-            <a:fld id="{9CA46EB4-4279-433C-81D6-623C23DFE035}" type="slidenum">
+            <a:fld id="{29B47FA3-F80B-4875-B9AD-B45B4D827857}" type="slidenum">
               <a:t>&lt;#&gt;</a:t>
             </a:fld>
           </a:p>
@@ -1973,7 +1967,7 @@
         <p:spPr>
           <a:xfrm>
             <a:off x="1143000" y="841680"/>
-            <a:ext cx="6857280" cy="1789920"/>
+            <a:ext cx="6856920" cy="1789560"/>
           </a:xfrm>
           <a:prstGeom prst="rect">
             <a:avLst/>
@@ -2031,7 +2025,7 @@
         <p:txBody>
           <a:bodyPr/>
           <a:p>
-            <a:fld id="{4F0CE7BC-6EE0-4CFF-B542-525DE10C1832}" type="slidenum">
+            <a:fld id="{93304A42-986D-4B63-A3B0-2C80B0996580}" type="slidenum">
               <a:t>&lt;#&gt;</a:t>
             </a:fld>
           </a:p>
@@ -2093,7 +2087,7 @@
         <p:spPr>
           <a:xfrm>
             <a:off x="1143000" y="841680"/>
-            <a:ext cx="6857280" cy="8298360"/>
+            <a:ext cx="6856920" cy="8296560"/>
           </a:xfrm>
           <a:prstGeom prst="rect">
             <a:avLst/>
@@ -2151,7 +2145,7 @@
         <p:txBody>
           <a:bodyPr/>
           <a:p>
-            <a:fld id="{D52CF350-8B2B-41AD-A539-E20F85564982}" type="slidenum">
+            <a:fld id="{6C7AB54B-C196-407E-843D-3DC0BDC84E91}" type="slidenum">
               <a:t>&lt;#&gt;</a:t>
             </a:fld>
           </a:p>
@@ -2213,7 +2207,7 @@
         <p:spPr>
           <a:xfrm>
             <a:off x="1143000" y="841680"/>
-            <a:ext cx="6857280" cy="1789920"/>
+            <a:ext cx="6856920" cy="1789560"/>
           </a:xfrm>
           <a:prstGeom prst="rect">
             <a:avLst/>
@@ -2250,7 +2244,7 @@
         <p:spPr>
           <a:xfrm>
             <a:off x="457200" y="1203480"/>
-            <a:ext cx="4015800" cy="1422720"/>
+            <a:ext cx="4015440" cy="1422360"/>
           </a:xfrm>
           <a:prstGeom prst="rect">
             <a:avLst/>
@@ -2283,8 +2277,8 @@
         </p:nvSpPr>
         <p:spPr>
           <a:xfrm>
-            <a:off x="4674240" y="1203480"/>
-            <a:ext cx="4015800" cy="2982960"/>
+            <a:off x="4673880" y="1203480"/>
+            <a:ext cx="4015440" cy="2982600"/>
           </a:xfrm>
           <a:prstGeom prst="rect">
             <a:avLst/>
@@ -2317,8 +2311,8 @@
         </p:nvSpPr>
         <p:spPr>
           <a:xfrm>
-            <a:off x="457200" y="2761920"/>
-            <a:ext cx="4015800" cy="1422720"/>
+            <a:off x="457200" y="2761200"/>
+            <a:ext cx="4015440" cy="1422360"/>
           </a:xfrm>
           <a:prstGeom prst="rect">
             <a:avLst/>
@@ -2373,7 +2367,7 @@
         <p:txBody>
           <a:bodyPr/>
           <a:p>
-            <a:fld id="{2101F481-6D3B-4397-87B3-847D30031230}" type="slidenum">
+            <a:fld id="{678B1F6A-FA82-4DE1-9F6A-B72CF48BAE2D}" type="slidenum">
               <a:t>&lt;#&gt;</a:t>
             </a:fld>
           </a:p>
@@ -2435,7 +2429,7 @@
         <p:spPr>
           <a:xfrm>
             <a:off x="1143000" y="841680"/>
-            <a:ext cx="6857280" cy="1789920"/>
+            <a:ext cx="6856920" cy="1789560"/>
           </a:xfrm>
           <a:prstGeom prst="rect">
             <a:avLst/>
@@ -2472,7 +2466,7 @@
         <p:spPr>
           <a:xfrm>
             <a:off x="457200" y="1203480"/>
-            <a:ext cx="4015800" cy="2982960"/>
+            <a:ext cx="4015440" cy="2982600"/>
           </a:xfrm>
           <a:prstGeom prst="rect">
             <a:avLst/>
@@ -2505,8 +2499,8 @@
         </p:nvSpPr>
         <p:spPr>
           <a:xfrm>
-            <a:off x="4674240" y="1203480"/>
-            <a:ext cx="4015800" cy="1422720"/>
+            <a:off x="4673880" y="1203480"/>
+            <a:ext cx="4015440" cy="1422360"/>
           </a:xfrm>
           <a:prstGeom prst="rect">
             <a:avLst/>
@@ -2539,8 +2533,8 @@
         </p:nvSpPr>
         <p:spPr>
           <a:xfrm>
-            <a:off x="4674240" y="2761920"/>
-            <a:ext cx="4015800" cy="1422720"/>
+            <a:off x="4673880" y="2761200"/>
+            <a:ext cx="4015440" cy="1422360"/>
           </a:xfrm>
           <a:prstGeom prst="rect">
             <a:avLst/>
@@ -2595,7 +2589,7 @@
         <p:txBody>
           <a:bodyPr/>
           <a:p>
-            <a:fld id="{7D6C53C8-D288-4D43-B135-70EA5ADE683B}" type="slidenum">
+            <a:fld id="{6F762FA5-33DB-4684-BCC0-633070C09F16}" type="slidenum">
               <a:t>&lt;#&gt;</a:t>
             </a:fld>
           </a:p>
@@ -2657,7 +2651,7 @@
         <p:spPr>
           <a:xfrm>
             <a:off x="1143000" y="841680"/>
-            <a:ext cx="6857280" cy="1789920"/>
+            <a:ext cx="6856920" cy="1789560"/>
           </a:xfrm>
           <a:prstGeom prst="rect">
             <a:avLst/>
@@ -2694,7 +2688,7 @@
         <p:spPr>
           <a:xfrm>
             <a:off x="457200" y="1203480"/>
-            <a:ext cx="4015800" cy="1422720"/>
+            <a:ext cx="4015440" cy="1422360"/>
           </a:xfrm>
           <a:prstGeom prst="rect">
             <a:avLst/>
@@ -2727,8 +2721,8 @@
         </p:nvSpPr>
         <p:spPr>
           <a:xfrm>
-            <a:off x="4674240" y="1203480"/>
-            <a:ext cx="4015800" cy="1422720"/>
+            <a:off x="4673880" y="1203480"/>
+            <a:ext cx="4015440" cy="1422360"/>
           </a:xfrm>
           <a:prstGeom prst="rect">
             <a:avLst/>
@@ -2761,8 +2755,8 @@
         </p:nvSpPr>
         <p:spPr>
           <a:xfrm>
-            <a:off x="457200" y="2761920"/>
-            <a:ext cx="8229240" cy="1422720"/>
+            <a:off x="457200" y="2761200"/>
+            <a:ext cx="8228880" cy="1422360"/>
           </a:xfrm>
           <a:prstGeom prst="rect">
             <a:avLst/>
@@ -2817,7 +2811,7 @@
         <p:txBody>
           <a:bodyPr/>
           <a:p>
-            <a:fld id="{357ECD7D-3572-44C9-B272-09143831BAC3}" type="slidenum">
+            <a:fld id="{A5AE5CB3-F656-4441-907C-95C23B150BD9}" type="slidenum">
               <a:t>&lt;#&gt;</a:t>
             </a:fld>
           </a:p>
@@ -2886,7 +2880,7 @@
         <p:spPr>
           <a:xfrm>
             <a:off x="1143000" y="841680"/>
-            <a:ext cx="6857280" cy="1789920"/>
+            <a:ext cx="6856920" cy="1789560"/>
           </a:xfrm>
           <a:prstGeom prst="rect">
             <a:avLst/>
@@ -2920,13 +2914,196 @@
             <a:spLocks noGrp="1"/>
           </p:cNvSpPr>
           <p:nvPr>
+            <p:ph type="body"/>
+          </p:nvPr>
+        </p:nvSpPr>
+        <p:spPr>
+          <a:xfrm>
+            <a:off x="457200" y="1203480"/>
+            <a:ext cx="8228880" cy="2982600"/>
+          </a:xfrm>
+          <a:prstGeom prst="rect">
+            <a:avLst/>
+          </a:prstGeom>
+          <a:noFill/>
+          <a:ln w="0">
+            <a:noFill/>
+          </a:ln>
+        </p:spPr>
+        <p:txBody>
+          <a:bodyPr lIns="0" rIns="0" tIns="0" bIns="0" anchor="t">
+            <a:normAutofit/>
+          </a:bodyPr>
+          <a:p>
+            <a:pPr marL="432000" indent="-324000">
+              <a:spcBef>
+                <a:spcPts val="1417"/>
+              </a:spcBef>
+              <a:buClr>
+                <a:srgbClr val="000000"/>
+              </a:buClr>
+              <a:buSzPct val="45000"/>
+              <a:buFont typeface="Wingdings" charset="2"/>
+              <a:buChar char=""/>
+            </a:pPr>
+            <a:r>
+              <a:rPr b="0" lang="en-US" sz="1800" spc="-1" strike="noStrike">
+                <a:latin typeface="Arial"/>
+              </a:rPr>
+              <a:t>Click to edit the outline text format</a:t>
+            </a:r>
+            <a:endParaRPr b="0" lang="en-US" sz="1800" spc="-1" strike="noStrike">
+              <a:latin typeface="Arial"/>
+            </a:endParaRPr>
+          </a:p>
+          <a:p>
+            <a:pPr lvl="1" marL="864000" indent="-324000">
+              <a:spcBef>
+                <a:spcPts val="1134"/>
+              </a:spcBef>
+              <a:buClr>
+                <a:srgbClr val="000000"/>
+              </a:buClr>
+              <a:buSzPct val="75000"/>
+              <a:buFont typeface="Symbol" charset="2"/>
+              <a:buChar char=""/>
+            </a:pPr>
+            <a:r>
+              <a:rPr b="0" lang="en-US" sz="1800" spc="-1" strike="noStrike">
+                <a:latin typeface="Arial"/>
+              </a:rPr>
+              <a:t>Second Outline Level</a:t>
+            </a:r>
+            <a:endParaRPr b="0" lang="en-US" sz="1800" spc="-1" strike="noStrike">
+              <a:latin typeface="Arial"/>
+            </a:endParaRPr>
+          </a:p>
+          <a:p>
+            <a:pPr lvl="2" marL="1296000" indent="-288000">
+              <a:spcBef>
+                <a:spcPts val="850"/>
+              </a:spcBef>
+              <a:buClr>
+                <a:srgbClr val="000000"/>
+              </a:buClr>
+              <a:buSzPct val="45000"/>
+              <a:buFont typeface="Wingdings" charset="2"/>
+              <a:buChar char=""/>
+            </a:pPr>
+            <a:r>
+              <a:rPr b="0" lang="en-US" sz="1800" spc="-1" strike="noStrike">
+                <a:latin typeface="Arial"/>
+              </a:rPr>
+              <a:t>Third Outline Level</a:t>
+            </a:r>
+            <a:endParaRPr b="0" lang="en-US" sz="1800" spc="-1" strike="noStrike">
+              <a:latin typeface="Arial"/>
+            </a:endParaRPr>
+          </a:p>
+          <a:p>
+            <a:pPr lvl="3" marL="1728000" indent="-216000">
+              <a:spcBef>
+                <a:spcPts val="567"/>
+              </a:spcBef>
+              <a:buClr>
+                <a:srgbClr val="000000"/>
+              </a:buClr>
+              <a:buSzPct val="75000"/>
+              <a:buFont typeface="Symbol" charset="2"/>
+              <a:buChar char=""/>
+            </a:pPr>
+            <a:r>
+              <a:rPr b="0" lang="en-US" sz="1800" spc="-1" strike="noStrike">
+                <a:latin typeface="Arial"/>
+              </a:rPr>
+              <a:t>Fourth Outline Level</a:t>
+            </a:r>
+            <a:endParaRPr b="0" lang="en-US" sz="1800" spc="-1" strike="noStrike">
+              <a:latin typeface="Arial"/>
+            </a:endParaRPr>
+          </a:p>
+          <a:p>
+            <a:pPr lvl="4" marL="2160000" indent="-216000">
+              <a:spcBef>
+                <a:spcPts val="283"/>
+              </a:spcBef>
+              <a:buClr>
+                <a:srgbClr val="000000"/>
+              </a:buClr>
+              <a:buSzPct val="45000"/>
+              <a:buFont typeface="Wingdings" charset="2"/>
+              <a:buChar char=""/>
+            </a:pPr>
+            <a:r>
+              <a:rPr b="0" lang="en-US" sz="1800" spc="-1" strike="noStrike">
+                <a:latin typeface="Arial"/>
+              </a:rPr>
+              <a:t>Fifth Outline Level</a:t>
+            </a:r>
+            <a:endParaRPr b="0" lang="en-US" sz="1800" spc="-1" strike="noStrike">
+              <a:latin typeface="Arial"/>
+            </a:endParaRPr>
+          </a:p>
+          <a:p>
+            <a:pPr lvl="5" marL="2592000" indent="-216000">
+              <a:spcBef>
+                <a:spcPts val="283"/>
+              </a:spcBef>
+              <a:buClr>
+                <a:srgbClr val="000000"/>
+              </a:buClr>
+              <a:buSzPct val="45000"/>
+              <a:buFont typeface="Wingdings" charset="2"/>
+              <a:buChar char=""/>
+            </a:pPr>
+            <a:r>
+              <a:rPr b="0" lang="en-US" sz="1800" spc="-1" strike="noStrike">
+                <a:latin typeface="Arial"/>
+              </a:rPr>
+              <a:t>Sixth Outline Level</a:t>
+            </a:r>
+            <a:endParaRPr b="0" lang="en-US" sz="1800" spc="-1" strike="noStrike">
+              <a:latin typeface="Arial"/>
+            </a:endParaRPr>
+          </a:p>
+          <a:p>
+            <a:pPr lvl="6" marL="3024000" indent="-216000">
+              <a:spcBef>
+                <a:spcPts val="283"/>
+              </a:spcBef>
+              <a:buClr>
+                <a:srgbClr val="000000"/>
+              </a:buClr>
+              <a:buSzPct val="45000"/>
+              <a:buFont typeface="Wingdings" charset="2"/>
+              <a:buChar char=""/>
+            </a:pPr>
+            <a:r>
+              <a:rPr b="0" lang="en-US" sz="1800" spc="-1" strike="noStrike">
+                <a:latin typeface="Arial"/>
+              </a:rPr>
+              <a:t>Seventh Outline Level</a:t>
+            </a:r>
+            <a:endParaRPr b="0" lang="en-US" sz="1800" spc="-1" strike="noStrike">
+              <a:latin typeface="Arial"/>
+            </a:endParaRPr>
+          </a:p>
+        </p:txBody>
+      </p:sp>
+      <p:sp>
+        <p:nvSpPr>
+          <p:cNvPr id="2" name="PlaceHolder 3"/>
+          <p:cNvSpPr>
+            <a:spLocks noGrp="1"/>
+          </p:cNvSpPr>
+          <p:nvPr>
             <p:ph type="ftr" idx="1"/>
           </p:nvPr>
         </p:nvSpPr>
         <p:spPr>
           <a:xfrm>
             <a:off x="3029040" y="4767120"/>
-            <a:ext cx="3085560" cy="273240"/>
+            <a:ext cx="3085200" cy="272880"/>
           </a:xfrm>
           <a:prstGeom prst="rect">
             <a:avLst/>
@@ -2972,7 +3149,7 @@
       </p:sp>
       <p:sp>
         <p:nvSpPr>
-          <p:cNvPr id="2" name="PlaceHolder 3"/>
+          <p:cNvPr id="3" name="PlaceHolder 4"/>
           <p:cNvSpPr>
             <a:spLocks noGrp="1"/>
           </p:cNvSpPr>
@@ -2983,7 +3160,7 @@
         <p:spPr>
           <a:xfrm>
             <a:off x="6458040" y="4767120"/>
-            <a:ext cx="2056680" cy="273240"/>
+            <a:ext cx="2056320" cy="272880"/>
           </a:xfrm>
           <a:prstGeom prst="rect">
             <a:avLst/>
@@ -3018,7 +3195,7 @@
               </a:lnSpc>
               <a:buNone/>
             </a:pPr>
-            <a:fld id="{629CB97A-3349-4CEB-840B-AE625691B5F4}" type="slidenum">
+            <a:fld id="{85FA9733-1554-43CA-BD5C-1A5EE807C736}" type="slidenum">
               <a:rPr b="0" lang="en-US" sz="900" spc="-1" strike="noStrike">
                 <a:solidFill>
                   <a:srgbClr val="8b8b8b"/>
@@ -3035,7 +3212,7 @@
       </p:sp>
       <p:sp>
         <p:nvSpPr>
-          <p:cNvPr id="3" name="PlaceHolder 4"/>
+          <p:cNvPr id="4" name="PlaceHolder 5"/>
           <p:cNvSpPr>
             <a:spLocks noGrp="1"/>
           </p:cNvSpPr>
@@ -3046,7 +3223,7 @@
         <p:spPr>
           <a:xfrm>
             <a:off x="628560" y="4767120"/>
-            <a:ext cx="2056680" cy="273240"/>
+            <a:ext cx="2056320" cy="272880"/>
           </a:xfrm>
           <a:prstGeom prst="rect">
             <a:avLst/>
@@ -3076,189 +3253,6 @@
             </a:r>
             <a:endParaRPr b="0" lang="en-US" sz="1400" spc="-1" strike="noStrike">
               <a:latin typeface="Times New Roman"/>
-            </a:endParaRPr>
-          </a:p>
-        </p:txBody>
-      </p:sp>
-      <p:sp>
-        <p:nvSpPr>
-          <p:cNvPr id="4" name="PlaceHolder 5"/>
-          <p:cNvSpPr>
-            <a:spLocks noGrp="1"/>
-          </p:cNvSpPr>
-          <p:nvPr>
-            <p:ph type="body"/>
-          </p:nvPr>
-        </p:nvSpPr>
-        <p:spPr>
-          <a:xfrm>
-            <a:off x="457200" y="1203480"/>
-            <a:ext cx="8229240" cy="2982960"/>
-          </a:xfrm>
-          <a:prstGeom prst="rect">
-            <a:avLst/>
-          </a:prstGeom>
-          <a:noFill/>
-          <a:ln w="0">
-            <a:noFill/>
-          </a:ln>
-        </p:spPr>
-        <p:txBody>
-          <a:bodyPr lIns="0" rIns="0" tIns="0" bIns="0" anchor="t">
-            <a:normAutofit/>
-          </a:bodyPr>
-          <a:p>
-            <a:pPr marL="432000" indent="-324000">
-              <a:spcBef>
-                <a:spcPts val="1417"/>
-              </a:spcBef>
-              <a:buClr>
-                <a:srgbClr val="000000"/>
-              </a:buClr>
-              <a:buSzPct val="45000"/>
-              <a:buFont typeface="Wingdings" charset="2"/>
-              <a:buChar char=""/>
-            </a:pPr>
-            <a:r>
-              <a:rPr b="0" lang="en-US" sz="3200" spc="-1" strike="noStrike">
-                <a:latin typeface="Arial"/>
-              </a:rPr>
-              <a:t>Click to edit the outline text format</a:t>
-            </a:r>
-            <a:endParaRPr b="0" lang="en-US" sz="3200" spc="-1" strike="noStrike">
-              <a:latin typeface="Arial"/>
-            </a:endParaRPr>
-          </a:p>
-          <a:p>
-            <a:pPr lvl="1" marL="864000" indent="-324000">
-              <a:spcBef>
-                <a:spcPts val="1134"/>
-              </a:spcBef>
-              <a:buClr>
-                <a:srgbClr val="000000"/>
-              </a:buClr>
-              <a:buSzPct val="75000"/>
-              <a:buFont typeface="Symbol" charset="2"/>
-              <a:buChar char=""/>
-            </a:pPr>
-            <a:r>
-              <a:rPr b="0" lang="en-US" sz="2800" spc="-1" strike="noStrike">
-                <a:latin typeface="Arial"/>
-              </a:rPr>
-              <a:t>Second Outline Level</a:t>
-            </a:r>
-            <a:endParaRPr b="0" lang="en-US" sz="2800" spc="-1" strike="noStrike">
-              <a:latin typeface="Arial"/>
-            </a:endParaRPr>
-          </a:p>
-          <a:p>
-            <a:pPr lvl="2" marL="1296000" indent="-288000">
-              <a:spcBef>
-                <a:spcPts val="850"/>
-              </a:spcBef>
-              <a:buClr>
-                <a:srgbClr val="000000"/>
-              </a:buClr>
-              <a:buSzPct val="45000"/>
-              <a:buFont typeface="Wingdings" charset="2"/>
-              <a:buChar char=""/>
-            </a:pPr>
-            <a:r>
-              <a:rPr b="0" lang="en-US" sz="2400" spc="-1" strike="noStrike">
-                <a:latin typeface="Arial"/>
-              </a:rPr>
-              <a:t>Third Outline Level</a:t>
-            </a:r>
-            <a:endParaRPr b="0" lang="en-US" sz="2400" spc="-1" strike="noStrike">
-              <a:latin typeface="Arial"/>
-            </a:endParaRPr>
-          </a:p>
-          <a:p>
-            <a:pPr lvl="3" marL="1728000" indent="-216000">
-              <a:spcBef>
-                <a:spcPts val="567"/>
-              </a:spcBef>
-              <a:buClr>
-                <a:srgbClr val="000000"/>
-              </a:buClr>
-              <a:buSzPct val="75000"/>
-              <a:buFont typeface="Symbol" charset="2"/>
-              <a:buChar char=""/>
-            </a:pPr>
-            <a:r>
-              <a:rPr b="0" lang="en-US" sz="2000" spc="-1" strike="noStrike">
-                <a:latin typeface="Arial"/>
-              </a:rPr>
-              <a:t>Fourth Outline Level</a:t>
-            </a:r>
-            <a:endParaRPr b="0" lang="en-US" sz="2000" spc="-1" strike="noStrike">
-              <a:latin typeface="Arial"/>
-            </a:endParaRPr>
-          </a:p>
-          <a:p>
-            <a:pPr lvl="4" marL="2160000" indent="-216000">
-              <a:spcBef>
-                <a:spcPts val="283"/>
-              </a:spcBef>
-              <a:buClr>
-                <a:srgbClr val="000000"/>
-              </a:buClr>
-              <a:buSzPct val="45000"/>
-              <a:buFont typeface="Wingdings" charset="2"/>
-              <a:buChar char=""/>
-            </a:pPr>
-            <a:r>
-              <a:rPr b="0" lang="en-US" sz="2000" spc="-1" strike="noStrike">
-                <a:latin typeface="Arial"/>
-              </a:rPr>
-              <a:t>Fifth Outline Level</a:t>
-            </a:r>
-            <a:endParaRPr b="0" lang="en-US" sz="2000" spc="-1" strike="noStrike">
-              <a:latin typeface="Arial"/>
-            </a:endParaRPr>
-          </a:p>
-          <a:p>
-            <a:pPr lvl="5" marL="2592000" indent="-216000">
-              <a:spcBef>
-                <a:spcPts val="283"/>
-              </a:spcBef>
-              <a:buClr>
-                <a:srgbClr val="000000"/>
-              </a:buClr>
-              <a:buSzPct val="45000"/>
-              <a:buFont typeface="Wingdings" charset="2"/>
-              <a:buChar char=""/>
-            </a:pPr>
-            <a:r>
-              <a:rPr b="0" lang="en-US" sz="2000" spc="-1" strike="noStrike">
-                <a:latin typeface="Arial"/>
-              </a:rPr>
-              <a:t>Sixth Outline Level</a:t>
-            </a:r>
-            <a:endParaRPr b="0" lang="en-US" sz="2000" spc="-1" strike="noStrike">
-              <a:latin typeface="Arial"/>
-            </a:endParaRPr>
-          </a:p>
-          <a:p>
-            <a:pPr lvl="6" marL="3024000" indent="-216000">
-              <a:spcBef>
-                <a:spcPts val="283"/>
-              </a:spcBef>
-              <a:buClr>
-                <a:srgbClr val="000000"/>
-              </a:buClr>
-              <a:buSzPct val="45000"/>
-              <a:buFont typeface="Wingdings" charset="2"/>
-              <a:buChar char=""/>
-            </a:pPr>
-            <a:r>
-              <a:rPr b="0" lang="en-US" sz="2000" spc="-1" strike="noStrike">
-                <a:latin typeface="Arial"/>
-              </a:rPr>
-              <a:t>Seventh Outline Level</a:t>
-            </a:r>
-            <a:endParaRPr b="0" lang="en-US" sz="2000" spc="-1" strike="noStrike">
-              <a:latin typeface="Arial"/>
             </a:endParaRPr>
           </a:p>
         </p:txBody>
@@ -3309,7 +3303,7 @@
         <p:spPr>
           <a:xfrm>
             <a:off x="186840" y="178200"/>
-            <a:ext cx="8769960" cy="4757760"/>
+            <a:ext cx="8769600" cy="4757400"/>
           </a:xfrm>
           <a:prstGeom prst="roundRect">
             <a:avLst>
@@ -3347,7 +3341,7 @@
         <p:spPr>
           <a:xfrm>
             <a:off x="460080" y="4445640"/>
-            <a:ext cx="2998800" cy="269280"/>
+            <a:ext cx="2998440" cy="268920"/>
           </a:xfrm>
           <a:prstGeom prst="rect">
             <a:avLst/>
@@ -3413,7 +3407,7 @@
         <p:spPr>
           <a:xfrm>
             <a:off x="2423160" y="4446360"/>
-            <a:ext cx="290880" cy="290880"/>
+            <a:ext cx="290520" cy="290520"/>
           </a:xfrm>
           <a:prstGeom prst="rect">
             <a:avLst/>
@@ -3432,7 +3426,7 @@
         <p:spPr>
           <a:xfrm>
             <a:off x="460080" y="622080"/>
-            <a:ext cx="6925680" cy="3306600"/>
+            <a:ext cx="6925320" cy="3306240"/>
           </a:xfrm>
           <a:prstGeom prst="rect">
             <a:avLst/>
@@ -3488,7 +3482,7 @@
         <p:spPr>
           <a:xfrm>
             <a:off x="5753880" y="2557440"/>
-            <a:ext cx="4009680" cy="3133080"/>
+            <a:ext cx="4009320" cy="3132720"/>
           </a:xfrm>
           <a:prstGeom prst="rect">
             <a:avLst/>
@@ -3541,7 +3535,7 @@
         <p:spPr>
           <a:xfrm>
             <a:off x="5753880" y="2557440"/>
-            <a:ext cx="4009680" cy="3133080"/>
+            <a:ext cx="4009320" cy="3132720"/>
           </a:xfrm>
           <a:prstGeom prst="rect">
             <a:avLst/>
@@ -3560,7 +3554,7 @@
         <p:spPr>
           <a:xfrm>
             <a:off x="185760" y="831240"/>
-            <a:ext cx="899280" cy="899280"/>
+            <a:ext cx="898920" cy="898920"/>
           </a:xfrm>
           <a:prstGeom prst="ellipse">
             <a:avLst/>
@@ -3620,7 +3614,7 @@
         <p:spPr>
           <a:xfrm>
             <a:off x="185760" y="2381400"/>
-            <a:ext cx="899280" cy="887400"/>
+            <a:ext cx="898920" cy="887040"/>
           </a:xfrm>
           <a:prstGeom prst="ellipse">
             <a:avLst/>
@@ -3680,7 +3674,7 @@
         <p:spPr>
           <a:xfrm>
             <a:off x="185760" y="3860640"/>
-            <a:ext cx="899280" cy="899280"/>
+            <a:ext cx="898920" cy="898920"/>
           </a:xfrm>
           <a:prstGeom prst="ellipse">
             <a:avLst/>
@@ -3740,7 +3734,7 @@
         <p:spPr>
           <a:xfrm>
             <a:off x="967680" y="797040"/>
-            <a:ext cx="3764520" cy="550440"/>
+            <a:ext cx="3764160" cy="550080"/>
           </a:xfrm>
           <a:prstGeom prst="rect">
             <a:avLst/>
@@ -3802,7 +3796,7 @@
         <p:spPr>
           <a:xfrm>
             <a:off x="967680" y="1332720"/>
-            <a:ext cx="3764520" cy="789480"/>
+            <a:ext cx="3764160" cy="789120"/>
           </a:xfrm>
           <a:prstGeom prst="rect">
             <a:avLst/>
@@ -3864,7 +3858,7 @@
         <p:spPr>
           <a:xfrm>
             <a:off x="964080" y="2292480"/>
-            <a:ext cx="3764520" cy="550440"/>
+            <a:ext cx="3764160" cy="550080"/>
           </a:xfrm>
           <a:prstGeom prst="rect">
             <a:avLst/>
@@ -3916,7 +3910,7 @@
         <p:spPr>
           <a:xfrm>
             <a:off x="964080" y="2825280"/>
-            <a:ext cx="3764520" cy="843120"/>
+            <a:ext cx="3764160" cy="842760"/>
           </a:xfrm>
           <a:prstGeom prst="rect">
             <a:avLst/>
@@ -3978,7 +3972,7 @@
         <p:spPr>
           <a:xfrm>
             <a:off x="964080" y="3777840"/>
-            <a:ext cx="3764520" cy="550440"/>
+            <a:ext cx="3764160" cy="550080"/>
           </a:xfrm>
           <a:prstGeom prst="rect">
             <a:avLst/>
@@ -4030,7 +4024,7 @@
         <p:spPr>
           <a:xfrm>
             <a:off x="964080" y="4310640"/>
-            <a:ext cx="3764520" cy="794520"/>
+            <a:ext cx="3764160" cy="794160"/>
           </a:xfrm>
           <a:prstGeom prst="rect">
             <a:avLst/>
@@ -4092,7 +4086,7 @@
         <p:spPr>
           <a:xfrm>
             <a:off x="5084640" y="987840"/>
-            <a:ext cx="3687480" cy="3496680"/>
+            <a:ext cx="3687120" cy="3496320"/>
           </a:xfrm>
           <a:prstGeom prst="roundRect">
             <a:avLst>
@@ -4156,7 +4150,7 @@
         <p:spPr>
           <a:xfrm>
             <a:off x="8519760" y="4831560"/>
-            <a:ext cx="484560" cy="226800"/>
+            <a:ext cx="484200" cy="226800"/>
           </a:xfrm>
           <a:prstGeom prst="rect">
             <a:avLst/>
@@ -4208,7 +4202,7 @@
         <p:spPr>
           <a:xfrm>
             <a:off x="421200" y="228600"/>
-            <a:ext cx="8457840" cy="685440"/>
+            <a:ext cx="8457480" cy="685080"/>
           </a:xfrm>
           <a:prstGeom prst="rect">
             <a:avLst/>
@@ -4237,7 +4231,11 @@
             </a:pPr>
             <a:r>
               <a:rPr b="0" lang="en-US" sz="1800" spc="-1" strike="noStrike">
+                <a:solidFill>
+                  <a:srgbClr val="000000"/>
+                </a:solidFill>
                 <a:latin typeface="Arial"/>
+                <a:ea typeface="DejaVu Sans"/>
               </a:rPr>
               <a:t>TITLE</a:t>
             </a:r>
@@ -4286,7 +4284,7 @@
         <p:spPr>
           <a:xfrm>
             <a:off x="506520" y="1484640"/>
-            <a:ext cx="2556720" cy="2055240"/>
+            <a:ext cx="2556360" cy="2054880"/>
           </a:xfrm>
           <a:prstGeom prst="roundRect">
             <a:avLst>
@@ -4326,7 +4324,7 @@
         <p:spPr>
           <a:xfrm>
             <a:off x="624240" y="1616760"/>
-            <a:ext cx="2289600" cy="729000"/>
+            <a:ext cx="2289240" cy="728640"/>
           </a:xfrm>
           <a:prstGeom prst="rect">
             <a:avLst/>
@@ -4378,7 +4376,7 @@
         <p:spPr>
           <a:xfrm>
             <a:off x="624240" y="2400480"/>
-            <a:ext cx="2289600" cy="1162080"/>
+            <a:ext cx="2289240" cy="1161720"/>
           </a:xfrm>
           <a:prstGeom prst="rect">
             <a:avLst/>
@@ -4440,7 +4438,7 @@
         <p:spPr>
           <a:xfrm>
             <a:off x="3309120" y="2066040"/>
-            <a:ext cx="2556720" cy="2055240"/>
+            <a:ext cx="2556360" cy="2054880"/>
           </a:xfrm>
           <a:prstGeom prst="roundRect">
             <a:avLst>
@@ -4480,7 +4478,7 @@
         <p:spPr>
           <a:xfrm>
             <a:off x="3426840" y="2198160"/>
-            <a:ext cx="2289600" cy="729000"/>
+            <a:ext cx="2289240" cy="728640"/>
           </a:xfrm>
           <a:prstGeom prst="rect">
             <a:avLst/>
@@ -4532,7 +4530,7 @@
         <p:spPr>
           <a:xfrm>
             <a:off x="3426840" y="2981880"/>
-            <a:ext cx="2289600" cy="1162080"/>
+            <a:ext cx="2289240" cy="1161720"/>
           </a:xfrm>
           <a:prstGeom prst="rect">
             <a:avLst/>
@@ -4584,7 +4582,7 @@
         <p:spPr>
           <a:xfrm>
             <a:off x="6111720" y="2659320"/>
-            <a:ext cx="2556720" cy="2055240"/>
+            <a:ext cx="2556360" cy="2054880"/>
           </a:xfrm>
           <a:prstGeom prst="roundRect">
             <a:avLst>
@@ -4624,7 +4622,7 @@
         <p:spPr>
           <a:xfrm>
             <a:off x="6229440" y="2791440"/>
-            <a:ext cx="2289600" cy="729000"/>
+            <a:ext cx="2289240" cy="728640"/>
           </a:xfrm>
           <a:prstGeom prst="rect">
             <a:avLst/>
@@ -4659,7 +4657,7 @@
                 <a:latin typeface="Arial"/>
                 <a:ea typeface="DejaVu Sans"/>
               </a:rPr>
-              <a:t>SUBTITLE2</a:t>
+              <a:t>SUBTITLE3</a:t>
             </a:r>
             <a:endParaRPr b="0" lang="en-US" sz="1400" spc="-1" strike="noStrike">
               <a:latin typeface="Arial"/>
@@ -4676,7 +4674,7 @@
         <p:spPr>
           <a:xfrm>
             <a:off x="6229440" y="3574800"/>
-            <a:ext cx="2289600" cy="1162080"/>
+            <a:ext cx="2289240" cy="1161720"/>
           </a:xfrm>
           <a:prstGeom prst="rect">
             <a:avLst/>
@@ -4711,7 +4709,7 @@
                 <a:latin typeface="Arial"/>
                 <a:ea typeface="DejaVu Sans"/>
               </a:rPr>
-              <a:t>TEXT2</a:t>
+              <a:t>TEXT3</a:t>
             </a:r>
             <a:endParaRPr b="0" lang="en-US" sz="1100" spc="-1" strike="noStrike">
               <a:latin typeface="Arial"/>
@@ -4728,7 +4726,7 @@
         <p:spPr>
           <a:xfrm>
             <a:off x="8519760" y="4831560"/>
-            <a:ext cx="484560" cy="226800"/>
+            <a:ext cx="484200" cy="226800"/>
           </a:xfrm>
           <a:prstGeom prst="rect">
             <a:avLst/>
@@ -4780,7 +4778,7 @@
         <p:spPr>
           <a:xfrm>
             <a:off x="457200" y="228600"/>
-            <a:ext cx="8229240" cy="1142640"/>
+            <a:ext cx="8228880" cy="1142280"/>
           </a:xfrm>
           <a:prstGeom prst="rect">
             <a:avLst/>
@@ -4809,7 +4807,11 @@
             </a:pPr>
             <a:r>
               <a:rPr b="0" lang="en-US" sz="1800" spc="-1" strike="noStrike">
+                <a:solidFill>
+                  <a:srgbClr val="000000"/>
+                </a:solidFill>
                 <a:latin typeface="Arial"/>
+                <a:ea typeface="DejaVu Sans"/>
               </a:rPr>
               <a:t>TITLE</a:t>
             </a:r>
@@ -4858,7 +4860,7 @@
         <p:spPr>
           <a:xfrm>
             <a:off x="3601800" y="3271680"/>
-            <a:ext cx="5236200" cy="1320840"/>
+            <a:ext cx="5235840" cy="1320480"/>
           </a:xfrm>
           <a:prstGeom prst="roundRect">
             <a:avLst>
@@ -4896,7 +4898,7 @@
         <p:spPr>
           <a:xfrm>
             <a:off x="6308640" y="1028880"/>
-            <a:ext cx="2532960" cy="2056680"/>
+            <a:ext cx="2532600" cy="2056320"/>
           </a:xfrm>
           <a:prstGeom prst="roundRect">
             <a:avLst>
@@ -4934,7 +4936,7 @@
         <p:spPr>
           <a:xfrm>
             <a:off x="3604320" y="1014480"/>
-            <a:ext cx="2532960" cy="2056680"/>
+            <a:ext cx="2532600" cy="2056320"/>
           </a:xfrm>
           <a:prstGeom prst="roundRect">
             <a:avLst>
@@ -4972,7 +4974,7 @@
         <p:spPr>
           <a:xfrm>
             <a:off x="3696480" y="1059120"/>
-            <a:ext cx="2343240" cy="713520"/>
+            <a:ext cx="2342880" cy="713160"/>
           </a:xfrm>
           <a:prstGeom prst="rect">
             <a:avLst/>
@@ -5034,7 +5036,7 @@
         <p:spPr>
           <a:xfrm>
             <a:off x="3696480" y="1843560"/>
-            <a:ext cx="2343240" cy="1141920"/>
+            <a:ext cx="2342880" cy="1141560"/>
           </a:xfrm>
           <a:prstGeom prst="rect">
             <a:avLst/>
@@ -5096,7 +5098,7 @@
         <p:spPr>
           <a:xfrm>
             <a:off x="6400080" y="1059120"/>
-            <a:ext cx="2340000" cy="713520"/>
+            <a:ext cx="2339640" cy="713160"/>
           </a:xfrm>
           <a:prstGeom prst="rect">
             <a:avLst/>
@@ -5148,7 +5150,7 @@
         <p:spPr>
           <a:xfrm>
             <a:off x="6400080" y="1843560"/>
-            <a:ext cx="2340000" cy="1141920"/>
+            <a:ext cx="2339640" cy="1141560"/>
           </a:xfrm>
           <a:prstGeom prst="rect">
             <a:avLst/>
@@ -5210,7 +5212,7 @@
         <p:spPr>
           <a:xfrm>
             <a:off x="3696480" y="3362040"/>
-            <a:ext cx="5236200" cy="328680"/>
+            <a:ext cx="5235840" cy="328320"/>
           </a:xfrm>
           <a:prstGeom prst="rect">
             <a:avLst/>
@@ -5262,7 +5264,7 @@
         <p:spPr>
           <a:xfrm>
             <a:off x="3696480" y="3713400"/>
-            <a:ext cx="5146560" cy="713520"/>
+            <a:ext cx="5146200" cy="713160"/>
           </a:xfrm>
           <a:prstGeom prst="rect">
             <a:avLst/>
@@ -5324,7 +5326,7 @@
         <p:spPr>
           <a:xfrm>
             <a:off x="384840" y="1028880"/>
-            <a:ext cx="3002400" cy="3564000"/>
+            <a:ext cx="3002040" cy="3563640"/>
           </a:xfrm>
           <a:prstGeom prst="roundRect">
             <a:avLst>
@@ -5388,7 +5390,7 @@
         <p:spPr>
           <a:xfrm>
             <a:off x="8519760" y="4831560"/>
-            <a:ext cx="484560" cy="226800"/>
+            <a:ext cx="484200" cy="226800"/>
           </a:xfrm>
           <a:prstGeom prst="rect">
             <a:avLst/>
@@ -5440,7 +5442,7 @@
         <p:spPr>
           <a:xfrm>
             <a:off x="313200" y="228600"/>
-            <a:ext cx="8457840" cy="685440"/>
+            <a:ext cx="8457480" cy="685080"/>
           </a:xfrm>
           <a:prstGeom prst="rect">
             <a:avLst/>
@@ -5469,7 +5471,11 @@
             </a:pPr>
             <a:r>
               <a:rPr b="0" lang="en-US" sz="1800" spc="-1" strike="noStrike">
+                <a:solidFill>
+                  <a:srgbClr val="000000"/>
+                </a:solidFill>
                 <a:latin typeface="Arial"/>
+                <a:ea typeface="DejaVu Sans"/>
               </a:rPr>
               <a:t>TITLE</a:t>
             </a:r>
@@ -5522,7 +5528,7 @@
         <p:spPr>
           <a:xfrm>
             <a:off x="-877680" y="2245320"/>
-            <a:ext cx="4613040" cy="3604680"/>
+            <a:ext cx="4612680" cy="3604320"/>
           </a:xfrm>
           <a:prstGeom prst="rect">
             <a:avLst/>
@@ -5541,7 +5547,7 @@
         <p:spPr>
           <a:xfrm>
             <a:off x="4157640" y="631080"/>
-            <a:ext cx="899280" cy="899280"/>
+            <a:ext cx="898920" cy="898920"/>
           </a:xfrm>
           <a:prstGeom prst="ellipse">
             <a:avLst/>
@@ -5603,7 +5609,7 @@
         <p:spPr>
           <a:xfrm>
             <a:off x="4157640" y="2127600"/>
-            <a:ext cx="899280" cy="887400"/>
+            <a:ext cx="898920" cy="887040"/>
           </a:xfrm>
           <a:prstGeom prst="ellipse">
             <a:avLst/>
@@ -5665,7 +5671,7 @@
         <p:spPr>
           <a:xfrm>
             <a:off x="4157640" y="3612240"/>
-            <a:ext cx="899280" cy="899280"/>
+            <a:ext cx="898920" cy="898920"/>
           </a:xfrm>
           <a:prstGeom prst="ellipse">
             <a:avLst/>
@@ -5727,7 +5733,7 @@
         <p:spPr>
           <a:xfrm>
             <a:off x="5146560" y="489600"/>
-            <a:ext cx="3578760" cy="550440"/>
+            <a:ext cx="3578400" cy="550080"/>
           </a:xfrm>
           <a:prstGeom prst="rect">
             <a:avLst/>
@@ -5789,7 +5795,7 @@
         <p:spPr>
           <a:xfrm>
             <a:off x="5146560" y="1025280"/>
-            <a:ext cx="3578760" cy="789480"/>
+            <a:ext cx="3578400" cy="789120"/>
           </a:xfrm>
           <a:prstGeom prst="rect">
             <a:avLst/>
@@ -5851,7 +5857,7 @@
         <p:spPr>
           <a:xfrm>
             <a:off x="5142960" y="1985400"/>
-            <a:ext cx="3578760" cy="550440"/>
+            <a:ext cx="3578400" cy="550080"/>
           </a:xfrm>
           <a:prstGeom prst="rect">
             <a:avLst/>
@@ -5903,7 +5909,7 @@
         <p:spPr>
           <a:xfrm>
             <a:off x="5142960" y="2517840"/>
-            <a:ext cx="3578760" cy="843120"/>
+            <a:ext cx="3578400" cy="842760"/>
           </a:xfrm>
           <a:prstGeom prst="rect">
             <a:avLst/>
@@ -5965,7 +5971,7 @@
         <p:spPr>
           <a:xfrm>
             <a:off x="5142960" y="3470760"/>
-            <a:ext cx="3578760" cy="550440"/>
+            <a:ext cx="3578400" cy="550080"/>
           </a:xfrm>
           <a:prstGeom prst="rect">
             <a:avLst/>
@@ -6017,7 +6023,7 @@
         <p:spPr>
           <a:xfrm>
             <a:off x="5142960" y="4003560"/>
-            <a:ext cx="3578760" cy="794520"/>
+            <a:ext cx="3578400" cy="794160"/>
           </a:xfrm>
           <a:prstGeom prst="rect">
             <a:avLst/>
@@ -6079,7 +6085,7 @@
         <p:spPr>
           <a:xfrm>
             <a:off x="8519760" y="4831560"/>
-            <a:ext cx="484560" cy="226800"/>
+            <a:ext cx="484200" cy="226800"/>
           </a:xfrm>
           <a:prstGeom prst="rect">
             <a:avLst/>
@@ -6131,7 +6137,7 @@
         <p:spPr>
           <a:xfrm>
             <a:off x="264600" y="228600"/>
-            <a:ext cx="3657240" cy="2016360"/>
+            <a:ext cx="3656880" cy="2016000"/>
           </a:xfrm>
           <a:prstGeom prst="rect">
             <a:avLst/>
@@ -6160,7 +6166,11 @@
             </a:pPr>
             <a:r>
               <a:rPr b="0" lang="en-US" sz="1800" spc="-1" strike="noStrike">
+                <a:solidFill>
+                  <a:srgbClr val="000000"/>
+                </a:solidFill>
                 <a:latin typeface="Arial"/>
+                <a:ea typeface="DejaVu Sans"/>
               </a:rPr>
               <a:t>TITLE</a:t>
             </a:r>
@@ -6209,7 +6219,7 @@
         <p:spPr>
           <a:xfrm>
             <a:off x="186840" y="178200"/>
-            <a:ext cx="8769960" cy="4757760"/>
+            <a:ext cx="8769600" cy="4757400"/>
           </a:xfrm>
           <a:prstGeom prst="roundRect">
             <a:avLst>
@@ -6247,7 +6257,7 @@
         <p:spPr>
           <a:xfrm>
             <a:off x="1640880" y="4489920"/>
-            <a:ext cx="2998800" cy="269280"/>
+            <a:ext cx="2998440" cy="268920"/>
           </a:xfrm>
           <a:prstGeom prst="rect">
             <a:avLst/>
@@ -6309,7 +6319,7 @@
         <p:spPr>
           <a:xfrm>
             <a:off x="867240" y="3488040"/>
-            <a:ext cx="256680" cy="256680"/>
+            <a:ext cx="256320" cy="256320"/>
           </a:xfrm>
           <a:prstGeom prst="ellipse">
             <a:avLst/>
@@ -6344,7 +6354,7 @@
         <p:spPr>
           <a:xfrm>
             <a:off x="351000" y="3691440"/>
-            <a:ext cx="1289160" cy="1133280"/>
+            <a:ext cx="1288800" cy="1132920"/>
           </a:xfrm>
           <a:prstGeom prst="rect">
             <a:avLst/>
@@ -6363,7 +6373,7 @@
         <p:spPr>
           <a:xfrm>
             <a:off x="460080" y="622080"/>
-            <a:ext cx="6925680" cy="3306600"/>
+            <a:ext cx="6925320" cy="3306240"/>
           </a:xfrm>
           <a:prstGeom prst="rect">
             <a:avLst/>
@@ -6419,7 +6429,7 @@
         <p:spPr>
           <a:xfrm>
             <a:off x="5753880" y="2557440"/>
-            <a:ext cx="4009680" cy="3133080"/>
+            <a:ext cx="4009320" cy="3132720"/>
           </a:xfrm>
           <a:prstGeom prst="rect">
             <a:avLst/>
